--- a/decks/hist-holocaust/hist-holocaust_ch5_camps-final-solution.pptx
+++ b/decks/hist-holocaust/hist-holocaust_ch5_camps-final-solution.pptx
@@ -126,31 +126,31 @@
   <p:extLst>
     <p:ext uri="{521415D9-36F7-43E2-AB2F-B90AF26B5E84}">
       <p14:sectionLst xmlns:p14="http://schemas.microsoft.com/office/powerpoint/2010/main">
-        <p14:section name="Opening" id="{f845f953-c562-2028-69de-9ef9b450f90b}">
+        <p14:section name="Opening" id="{f861a51a-4016-35e0-6065-2b7e40bca345}">
           <p14:sldIdLst>
             <p14:sldId id="256"/>
           </p14:sldIdLst>
         </p14:section>
-        <p14:section name="Gate" id="{0863f98b-7ef3-9601-ed62-2f4d28ac0b9f}">
+        <p14:section name="Gate" id="{978f2d4c-4964-d468-f702-df62286243df}">
           <p14:sldIdLst>
             <p14:sldId id="257"/>
             <p14:sldId id="258"/>
             <p14:sldId id="259"/>
           </p14:sldIdLst>
         </p14:section>
-        <p14:section name="Pre-teach" id="{91e5cfa1-5f2a-2245-a685-840777a3dbec}">
+        <p14:section name="Pre-teach" id="{9166648d-1c25-51a5-b1ae-ac376ef7ceea}">
           <p14:sldIdLst>
             <p14:sldId id="260"/>
             <p14:sldId id="261"/>
           </p14:sldIdLst>
         </p14:section>
-        <p14:section name="Read-along" id="{5ca03934-2a9b-3032-8d56-4cd215780a4a}">
+        <p14:section name="Read-along" id="{65124093-32da-7086-483e-1f559a391068}">
           <p14:sldIdLst>
             <p14:sldId id="262"/>
             <p14:sldId id="263"/>
           </p14:sldIdLst>
         </p14:section>
-        <p14:section name="Teach" id="{01970e83-4f5e-312f-1a44-52ab03f87afc}">
+        <p14:section name="Teach" id="{9f2af793-5aeb-5e36-b495-1fb82975fbdf}">
           <p14:sldIdLst>
             <p14:sldId id="264"/>
             <p14:sldId id="265"/>
@@ -159,19 +159,19 @@
             <p14:sldId id="268"/>
           </p14:sldIdLst>
         </p14:section>
-        <p14:section name="Routes" id="{eecd3e35-be21-8472-b575-ab3b7b07af24}">
+        <p14:section name="Routes" id="{1d8c1b22-5829-2389-5b91-26381a980fac}">
           <p14:sldIdLst>
             <p14:sldId id="269"/>
             <p14:sldId id="270"/>
             <p14:sldId id="271"/>
           </p14:sldIdLst>
         </p14:section>
-        <p14:section name="Close" id="{0e176f04-3f65-8336-de3c-7fed0edfcc96}">
+        <p14:section name="Close" id="{0a6d2b4e-611e-bbd4-bb97-da8d07a85456}">
           <p14:sldIdLst>
             <p14:sldId id="272"/>
           </p14:sldIdLst>
         </p14:section>
-        <p14:section name="Answers" id="{3f479b87-0c8c-f2f4-1866-83e99f837064}">
+        <p14:section name="Answers" id="{290e8704-f740-dc28-da64-076fa275fcc6}">
           <p14:sldIdLst>
             <p14:sldId id="273"/>
             <p14:sldId id="274"/>
